--- a/generated/Tier 1 Broker Scorecards/Horizons Insurance And Financial Services, Inc_Broker_Scorecard.pptx
+++ b/generated/Tier 1 Broker Scorecards/Horizons Insurance And Financial Services, Inc_Broker_Scorecard.pptx
@@ -3357,7 +3357,7 @@
                         <a:rPr sz="800">
                           <a:latin typeface="Segoe UI"/>
                         </a:rPr>
-                        <a:t>$4,857,693.58 / $5,127,242.48 / $1,864,727.19</a:t>
+                        <a:t>$4,857,693.58 / $5,127,795.66 / $1,865,280.37</a:t>
                       </a:r>
                     </a:p>
                   </a:txBody>
@@ -3394,7 +3394,7 @@
                         <a:rPr sz="900">
                           <a:latin typeface="Segoe UI"/>
                         </a:rPr>
-                        <a:t>Tier 1  |  6.56% / 15.00%</a:t>
+                        <a:t>Tier 1  |  6.61% / 15.00%</a:t>
                       </a:r>
                     </a:p>
                   </a:txBody>
@@ -3653,7 +3653,7 @@
                         <a:rPr sz="900">
                           <a:latin typeface="Segoe UI"/>
                         </a:rPr>
-                        <a:t>Fleet Subs: 76  |  Binds: 6</a:t>
+                        <a:t>Fleet Subs: 75  |  Binds: 7</a:t>
                       </a:r>
                     </a:p>
                   </a:txBody>
@@ -3690,7 +3690,7 @@
                         <a:rPr sz="900">
                           <a:latin typeface="Segoe UI"/>
                         </a:rPr>
-                        <a:t>Fleet Bound Premium: $384,605.41</a:t>
+                        <a:t>Fleet Bound Premium: $420,535.69</a:t>
                       </a:r>
                     </a:p>
                   </a:txBody>
@@ -3727,7 +3727,7 @@
                         <a:rPr sz="900">
                           <a:latin typeface="Segoe UI"/>
                         </a:rPr>
-                        <a:t>Fleet Book %: 20.6%</a:t>
+                        <a:t>Fleet Book %: 22.5%</a:t>
                       </a:r>
                     </a:p>
                   </a:txBody>
@@ -3766,7 +3766,7 @@
                         <a:rPr sz="900">
                           <a:latin typeface="Segoe UI"/>
                         </a:rPr>
-                        <a:t>Non-Fleet Subs: 1219  |  Binds: 79</a:t>
+                        <a:t>Non-Fleet Subs: 1227  |  Binds: 79</a:t>
                       </a:r>
                     </a:p>
                   </a:txBody>
@@ -3803,7 +3803,7 @@
                         <a:rPr sz="900">
                           <a:latin typeface="Segoe UI"/>
                         </a:rPr>
-                        <a:t>Non-Fleet Bound Premium: $1,480,121.78</a:t>
+                        <a:t>Non-Fleet Bound Premium: $1,444,744.68</a:t>
                       </a:r>
                     </a:p>
                   </a:txBody>
@@ -3840,7 +3840,7 @@
                         <a:rPr sz="900">
                           <a:latin typeface="Segoe UI"/>
                         </a:rPr>
-                        <a:t>Non-Fleet Book %: 79.4%</a:t>
+                        <a:t>Non-Fleet Book %: 77.5%</a:t>
                       </a:r>
                     </a:p>
                   </a:txBody>
@@ -4428,7 +4428,7 @@
                           </a:solidFill>
                           <a:latin typeface="Segoe UI"/>
                         </a:rPr>
-                        <a:t>188</a:t>
+                        <a:t>197</a:t>
                       </a:r>
                     </a:p>
                   </a:txBody>
@@ -4707,7 +4707,7 @@
                           </a:solidFill>
                           <a:latin typeface="Segoe UI"/>
                         </a:rPr>
-                        <a:t>8.5%</a:t>
+                        <a:t>9.1%</a:t>
                       </a:r>
                     </a:p>
                   </a:txBody>
@@ -4983,7 +4983,7 @@
                           </a:solidFill>
                           <a:latin typeface="Segoe UI"/>
                         </a:rPr>
-                        <a:t>16</a:t>
+                        <a:t>18</a:t>
                       </a:r>
                     </a:p>
                   </a:txBody>
@@ -5262,7 +5262,7 @@
                           </a:solidFill>
                           <a:latin typeface="Segoe UI"/>
                         </a:rPr>
-                        <a:t>$129.5K</a:t>
+                        <a:t>$130.1K</a:t>
                       </a:r>
                     </a:p>
                   </a:txBody>

--- a/generated/Tier 1 Broker Scorecards/Horizons Insurance And Financial Services, Inc_Broker_Scorecard.pptx
+++ b/generated/Tier 1 Broker Scorecards/Horizons Insurance And Financial Services, Inc_Broker_Scorecard.pptx
@@ -3394,7 +3394,7 @@
                         <a:rPr sz="900">
                           <a:latin typeface="Segoe UI"/>
                         </a:rPr>
-                        <a:t>Tier 1  |  6.61% / 15.00%</a:t>
+                        <a:t>Tier 1  |  6.41% / 15.00%</a:t>
                       </a:r>
                     </a:p>
                   </a:txBody>
@@ -3653,7 +3653,7 @@
                         <a:rPr sz="900">
                           <a:latin typeface="Segoe UI"/>
                         </a:rPr>
-                        <a:t>Fleet Subs: 75  |  Binds: 7</a:t>
+                        <a:t>Fleet Subs: 76  |  Binds: 7</a:t>
                       </a:r>
                     </a:p>
                   </a:txBody>
@@ -3690,7 +3690,7 @@
                         <a:rPr sz="900">
                           <a:latin typeface="Segoe UI"/>
                         </a:rPr>
-                        <a:t>Fleet Bound Premium: $420,535.69</a:t>
+                        <a:t>Fleet Bound Premium: $434,525.75</a:t>
                       </a:r>
                     </a:p>
                   </a:txBody>
@@ -3727,7 +3727,7 @@
                         <a:rPr sz="900">
                           <a:latin typeface="Segoe UI"/>
                         </a:rPr>
-                        <a:t>Fleet Book %: 22.5%</a:t>
+                        <a:t>Fleet Book %: 23.3%</a:t>
                       </a:r>
                     </a:p>
                   </a:txBody>
@@ -3766,7 +3766,7 @@
                         <a:rPr sz="900">
                           <a:latin typeface="Segoe UI"/>
                         </a:rPr>
-                        <a:t>Non-Fleet Subs: 1227  |  Binds: 79</a:t>
+                        <a:t>Non-Fleet Subs: 1235  |  Binds: 77</a:t>
                       </a:r>
                     </a:p>
                   </a:txBody>
@@ -3803,7 +3803,7 @@
                         <a:rPr sz="900">
                           <a:latin typeface="Segoe UI"/>
                         </a:rPr>
-                        <a:t>Non-Fleet Bound Premium: $1,444,744.68</a:t>
+                        <a:t>Non-Fleet Bound Premium: $1,430,754.62</a:t>
                       </a:r>
                     </a:p>
                   </a:txBody>
@@ -3840,7 +3840,7 @@
                         <a:rPr sz="900">
                           <a:latin typeface="Segoe UI"/>
                         </a:rPr>
-                        <a:t>Non-Fleet Book %: 77.5%</a:t>
+                        <a:t>Non-Fleet Book %: 76.7%</a:t>
                       </a:r>
                     </a:p>
                   </a:txBody>
@@ -4428,7 +4428,7 @@
                           </a:solidFill>
                           <a:latin typeface="Segoe UI"/>
                         </a:rPr>
-                        <a:t>197</a:t>
+                        <a:t>214</a:t>
                       </a:r>
                     </a:p>
                   </a:txBody>
@@ -4664,7 +4664,7 @@
                         <a:rPr sz="800">
                           <a:latin typeface="Segoe UI"/>
                         </a:rPr>
-                        <a:t>17.2%</a:t>
+                        <a:t>17.6%</a:t>
                       </a:r>
                     </a:p>
                   </a:txBody>
@@ -4707,7 +4707,7 @@
                           </a:solidFill>
                           <a:latin typeface="Segoe UI"/>
                         </a:rPr>
-                        <a:t>9.1%</a:t>
+                        <a:t>9.3%</a:t>
                       </a:r>
                     </a:p>
                   </a:txBody>
@@ -4943,7 +4943,7 @@
                         <a:rPr sz="800">
                           <a:latin typeface="Segoe UI"/>
                         </a:rPr>
-                        <a:t>44</a:t>
+                        <a:t>45</a:t>
                       </a:r>
                     </a:p>
                   </a:txBody>
@@ -4983,7 +4983,7 @@
                           </a:solidFill>
                           <a:latin typeface="Segoe UI"/>
                         </a:rPr>
-                        <a:t>18</a:t>
+                        <a:t>20</a:t>
                       </a:r>
                     </a:p>
                   </a:txBody>

--- a/generated/Tier 1 Broker Scorecards/Horizons Insurance And Financial Services, Inc_Broker_Scorecard.pptx
+++ b/generated/Tier 1 Broker Scorecards/Horizons Insurance And Financial Services, Inc_Broker_Scorecard.pptx
@@ -3357,7 +3357,7 @@
                         <a:rPr sz="800">
                           <a:latin typeface="Segoe UI"/>
                         </a:rPr>
-                        <a:t>$4,857,693.58 / $5,127,795.66 / $1,865,280.37</a:t>
+                        <a:t>$4,857,693.58 / $5,136,797.50 / $1,874,282.21</a:t>
                       </a:r>
                     </a:p>
                   </a:txBody>
@@ -3394,7 +3394,7 @@
                         <a:rPr sz="900">
                           <a:latin typeface="Segoe UI"/>
                         </a:rPr>
-                        <a:t>Tier 1  |  6.41% / 15.00%</a:t>
+                        <a:t>Tier 1  |  6.53% / 15.00%</a:t>
                       </a:r>
                     </a:p>
                   </a:txBody>
@@ -3431,7 +3431,7 @@
                         <a:rPr sz="900">
                           <a:latin typeface="Segoe UI"/>
                         </a:rPr>
-                        <a:t>$6,800,771.01  (27.4% achieved)</a:t>
+                        <a:t>$6,800,771.01  (27.6% achieved)</a:t>
                       </a:r>
                     </a:p>
                   </a:txBody>
@@ -3690,7 +3690,7 @@
                         <a:rPr sz="900">
                           <a:latin typeface="Segoe UI"/>
                         </a:rPr>
-                        <a:t>Fleet Bound Premium: $434,525.75</a:t>
+                        <a:t>Fleet Bound Premium: $430,111.03</a:t>
                       </a:r>
                     </a:p>
                   </a:txBody>
@@ -3727,7 +3727,7 @@
                         <a:rPr sz="900">
                           <a:latin typeface="Segoe UI"/>
                         </a:rPr>
-                        <a:t>Fleet Book %: 23.3%</a:t>
+                        <a:t>Fleet Book %: 22.9%</a:t>
                       </a:r>
                     </a:p>
                   </a:txBody>
@@ -3766,7 +3766,7 @@
                         <a:rPr sz="900">
                           <a:latin typeface="Segoe UI"/>
                         </a:rPr>
-                        <a:t>Non-Fleet Subs: 1235  |  Binds: 77</a:t>
+                        <a:t>Non-Fleet Subs: 1242  |  Binds: 79</a:t>
                       </a:r>
                     </a:p>
                   </a:txBody>
@@ -3803,7 +3803,7 @@
                         <a:rPr sz="900">
                           <a:latin typeface="Segoe UI"/>
                         </a:rPr>
-                        <a:t>Non-Fleet Bound Premium: $1,430,754.62</a:t>
+                        <a:t>Non-Fleet Bound Premium: $1,444,171.18</a:t>
                       </a:r>
                     </a:p>
                   </a:txBody>
@@ -3840,7 +3840,7 @@
                         <a:rPr sz="900">
                           <a:latin typeface="Segoe UI"/>
                         </a:rPr>
-                        <a:t>Non-Fleet Book %: 76.7%</a:t>
+                        <a:t>Non-Fleet Book %: 77.1%</a:t>
                       </a:r>
                     </a:p>
                   </a:txBody>
@@ -4428,7 +4428,7 @@
                           </a:solidFill>
                           <a:latin typeface="Segoe UI"/>
                         </a:rPr>
-                        <a:t>214</a:t>
+                        <a:t>221</a:t>
                       </a:r>
                     </a:p>
                   </a:txBody>
@@ -4624,7 +4624,7 @@
                           </a:solidFill>
                           <a:latin typeface="Segoe UI"/>
                         </a:rPr>
-                        <a:t>8.1%</a:t>
+                        <a:t>8.4%</a:t>
                       </a:r>
                     </a:p>
                   </a:txBody>
@@ -4707,7 +4707,7 @@
                           </a:solidFill>
                           <a:latin typeface="Segoe UI"/>
                         </a:rPr>
-                        <a:t>9.3%</a:t>
+                        <a:t>10.0%</a:t>
                       </a:r>
                     </a:p>
                   </a:txBody>
@@ -4906,7 +4906,7 @@
                           </a:solidFill>
                           <a:latin typeface="Segoe UI"/>
                         </a:rPr>
-                        <a:t>29</a:t>
+                        <a:t>30</a:t>
                       </a:r>
                     </a:p>
                   </a:txBody>
@@ -4983,7 +4983,7 @@
                           </a:solidFill>
                           <a:latin typeface="Segoe UI"/>
                         </a:rPr>
-                        <a:t>20</a:t>
+                        <a:t>22</a:t>
                       </a:r>
                     </a:p>
                   </a:txBody>
@@ -5179,7 +5179,7 @@
                           </a:solidFill>
                           <a:latin typeface="Segoe UI"/>
                         </a:rPr>
-                        <a:t>$319.1K</a:t>
+                        <a:t>$330.1K</a:t>
                       </a:r>
                     </a:p>
                   </a:txBody>
@@ -5262,7 +5262,7 @@
                           </a:solidFill>
                           <a:latin typeface="Segoe UI"/>
                         </a:rPr>
-                        <a:t>$130.1K</a:t>
+                        <a:t>$128.0K</a:t>
                       </a:r>
                     </a:p>
                   </a:txBody>

--- a/generated/Tier 1 Broker Scorecards/Horizons Insurance And Financial Services, Inc_Broker_Scorecard.pptx
+++ b/generated/Tier 1 Broker Scorecards/Horizons Insurance And Financial Services, Inc_Broker_Scorecard.pptx
@@ -3357,7 +3357,7 @@
                         <a:rPr sz="800">
                           <a:latin typeface="Segoe UI"/>
                         </a:rPr>
-                        <a:t>$4,857,693.58 / $5,136,797.50 / $1,874,282.21</a:t>
+                        <a:t>$4,857,693.58 / $5,150,209.16 / $1,887,693.87</a:t>
                       </a:r>
                     </a:p>
                   </a:txBody>
@@ -3394,7 +3394,7 @@
                         <a:rPr sz="900">
                           <a:latin typeface="Segoe UI"/>
                         </a:rPr>
-                        <a:t>Tier 1  |  6.53% / 15.00%</a:t>
+                        <a:t>Tier 1  |  6.49% / 15.00%</a:t>
                       </a:r>
                     </a:p>
                   </a:txBody>
@@ -3431,7 +3431,7 @@
                         <a:rPr sz="900">
                           <a:latin typeface="Segoe UI"/>
                         </a:rPr>
-                        <a:t>$6,800,771.01  (27.6% achieved)</a:t>
+                        <a:t>$6,800,771.01  (27.8% achieved)</a:t>
                       </a:r>
                     </a:p>
                   </a:txBody>
@@ -3653,7 +3653,7 @@
                         <a:rPr sz="900">
                           <a:latin typeface="Segoe UI"/>
                         </a:rPr>
-                        <a:t>Fleet Subs: 76  |  Binds: 7</a:t>
+                        <a:t>Fleet Subs: 77  |  Binds: 7</a:t>
                       </a:r>
                     </a:p>
                   </a:txBody>
@@ -3690,7 +3690,7 @@
                         <a:rPr sz="900">
                           <a:latin typeface="Segoe UI"/>
                         </a:rPr>
-                        <a:t>Fleet Bound Premium: $430,111.03</a:t>
+                        <a:t>Fleet Bound Premium: $426,242.83</a:t>
                       </a:r>
                     </a:p>
                   </a:txBody>
@@ -3727,7 +3727,7 @@
                         <a:rPr sz="900">
                           <a:latin typeface="Segoe UI"/>
                         </a:rPr>
-                        <a:t>Fleet Book %: 22.9%</a:t>
+                        <a:t>Fleet Book %: 22.6%</a:t>
                       </a:r>
                     </a:p>
                   </a:txBody>
@@ -3766,7 +3766,7 @@
                         <a:rPr sz="900">
                           <a:latin typeface="Segoe UI"/>
                         </a:rPr>
-                        <a:t>Non-Fleet Subs: 1242  |  Binds: 79</a:t>
+                        <a:t>Non-Fleet Subs: 1249  |  Binds: 79</a:t>
                       </a:r>
                     </a:p>
                   </a:txBody>
@@ -3803,7 +3803,7 @@
                         <a:rPr sz="900">
                           <a:latin typeface="Segoe UI"/>
                         </a:rPr>
-                        <a:t>Non-Fleet Bound Premium: $1,444,171.18</a:t>
+                        <a:t>Non-Fleet Bound Premium: $1,461,451.04</a:t>
                       </a:r>
                     </a:p>
                   </a:txBody>
@@ -3840,7 +3840,7 @@
                         <a:rPr sz="900">
                           <a:latin typeface="Segoe UI"/>
                         </a:rPr>
-                        <a:t>Non-Fleet Book %: 77.1%</a:t>
+                        <a:t>Non-Fleet Book %: 77.4%</a:t>
                       </a:r>
                     </a:p>
                   </a:txBody>
@@ -4428,7 +4428,7 @@
                           </a:solidFill>
                           <a:latin typeface="Segoe UI"/>
                         </a:rPr>
-                        <a:t>221</a:t>
+                        <a:t>229</a:t>
                       </a:r>
                     </a:p>
                   </a:txBody>
@@ -4624,7 +4624,7 @@
                           </a:solidFill>
                           <a:latin typeface="Segoe UI"/>
                         </a:rPr>
-                        <a:t>8.4%</a:t>
+                        <a:t>8.7%</a:t>
                       </a:r>
                     </a:p>
                   </a:txBody>
@@ -4707,7 +4707,7 @@
                           </a:solidFill>
                           <a:latin typeface="Segoe UI"/>
                         </a:rPr>
-                        <a:t>10.0%</a:t>
+                        <a:t>9.6%</a:t>
                       </a:r>
                     </a:p>
                   </a:txBody>
@@ -4906,7 +4906,7 @@
                           </a:solidFill>
                           <a:latin typeface="Segoe UI"/>
                         </a:rPr>
-                        <a:t>30</a:t>
+                        <a:t>31</a:t>
                       </a:r>
                     </a:p>
                   </a:txBody>
@@ -5262,7 +5262,7 @@
                           </a:solidFill>
                           <a:latin typeface="Segoe UI"/>
                         </a:rPr>
-                        <a:t>$128.0K</a:t>
+                        <a:t>$141.5K</a:t>
                       </a:r>
                     </a:p>
                   </a:txBody>

--- a/generated/Tier 1 Broker Scorecards/Horizons Insurance And Financial Services, Inc_Broker_Scorecard.pptx
+++ b/generated/Tier 1 Broker Scorecards/Horizons Insurance And Financial Services, Inc_Broker_Scorecard.pptx
@@ -3357,7 +3357,7 @@
                         <a:rPr sz="800">
                           <a:latin typeface="Segoe UI"/>
                         </a:rPr>
-                        <a:t>$4,857,693.58 / $5,150,209.16 / $1,887,693.87</a:t>
+                        <a:t>$4,857,693.58 / $5,217,636.03 / $1,955,120.74</a:t>
                       </a:r>
                     </a:p>
                   </a:txBody>
@@ -3394,7 +3394,7 @@
                         <a:rPr sz="900">
                           <a:latin typeface="Segoe UI"/>
                         </a:rPr>
-                        <a:t>Tier 1  |  6.49% / 15.00%</a:t>
+                        <a:t>Tier 1  |  6.35% / 15.00%</a:t>
                       </a:r>
                     </a:p>
                   </a:txBody>
@@ -3431,7 +3431,7 @@
                         <a:rPr sz="900">
                           <a:latin typeface="Segoe UI"/>
                         </a:rPr>
-                        <a:t>$6,800,771.01  (27.8% achieved)</a:t>
+                        <a:t>$6,800,771.01  (28.7% achieved)</a:t>
                       </a:r>
                     </a:p>
                   </a:txBody>
@@ -3653,7 +3653,7 @@
                         <a:rPr sz="900">
                           <a:latin typeface="Segoe UI"/>
                         </a:rPr>
-                        <a:t>Fleet Subs: 77  |  Binds: 7</a:t>
+                        <a:t>Fleet Subs: 78  |  Binds: 6</a:t>
                       </a:r>
                     </a:p>
                   </a:txBody>
@@ -3690,7 +3690,7 @@
                         <a:rPr sz="900">
                           <a:latin typeface="Segoe UI"/>
                         </a:rPr>
-                        <a:t>Fleet Bound Premium: $426,242.83</a:t>
+                        <a:t>Fleet Bound Premium: $368,089.21</a:t>
                       </a:r>
                     </a:p>
                   </a:txBody>
@@ -3727,7 +3727,7 @@
                         <a:rPr sz="900">
                           <a:latin typeface="Segoe UI"/>
                         </a:rPr>
-                        <a:t>Fleet Book %: 22.6%</a:t>
+                        <a:t>Fleet Book %: 18.8%</a:t>
                       </a:r>
                     </a:p>
                   </a:txBody>
@@ -3766,7 +3766,7 @@
                         <a:rPr sz="900">
                           <a:latin typeface="Segoe UI"/>
                         </a:rPr>
-                        <a:t>Non-Fleet Subs: 1249  |  Binds: 79</a:t>
+                        <a:t>Non-Fleet Subs: 1261  |  Binds: 79</a:t>
                       </a:r>
                     </a:p>
                   </a:txBody>
@@ -3803,7 +3803,7 @@
                         <a:rPr sz="900">
                           <a:latin typeface="Segoe UI"/>
                         </a:rPr>
-                        <a:t>Non-Fleet Bound Premium: $1,461,451.04</a:t>
+                        <a:t>Non-Fleet Bound Premium: $1,587,031.53</a:t>
                       </a:r>
                     </a:p>
                   </a:txBody>
@@ -3840,7 +3840,7 @@
                         <a:rPr sz="900">
                           <a:latin typeface="Segoe UI"/>
                         </a:rPr>
-                        <a:t>Non-Fleet Book %: 77.4%</a:t>
+                        <a:t>Non-Fleet Book %: 81.2%</a:t>
                       </a:r>
                     </a:p>
                   </a:txBody>
@@ -4428,7 +4428,7 @@
                           </a:solidFill>
                           <a:latin typeface="Segoe UI"/>
                         </a:rPr>
-                        <a:t>229</a:t>
+                        <a:t>246</a:t>
                       </a:r>
                     </a:p>
                   </a:txBody>
@@ -4624,7 +4624,7 @@
                           </a:solidFill>
                           <a:latin typeface="Segoe UI"/>
                         </a:rPr>
-                        <a:t>8.7%</a:t>
+                        <a:t>9.0%</a:t>
                       </a:r>
                     </a:p>
                   </a:txBody>
@@ -4707,7 +4707,7 @@
                           </a:solidFill>
                           <a:latin typeface="Segoe UI"/>
                         </a:rPr>
-                        <a:t>9.6%</a:t>
+                        <a:t>9.8%</a:t>
                       </a:r>
                     </a:p>
                   </a:txBody>
@@ -4906,7 +4906,7 @@
                           </a:solidFill>
                           <a:latin typeface="Segoe UI"/>
                         </a:rPr>
-                        <a:t>31</a:t>
+                        <a:t>32</a:t>
                       </a:r>
                     </a:p>
                   </a:txBody>
@@ -4983,7 +4983,7 @@
                           </a:solidFill>
                           <a:latin typeface="Segoe UI"/>
                         </a:rPr>
-                        <a:t>22</a:t>
+                        <a:t>24</a:t>
                       </a:r>
                     </a:p>
                   </a:txBody>
@@ -5262,7 +5262,7 @@
                           </a:solidFill>
                           <a:latin typeface="Segoe UI"/>
                         </a:rPr>
-                        <a:t>$141.5K</a:t>
+                        <a:t>$208.9K</a:t>
                       </a:r>
                     </a:p>
                   </a:txBody>

--- a/generated/Tier 1 Broker Scorecards/Horizons Insurance And Financial Services, Inc_Broker_Scorecard.pptx
+++ b/generated/Tier 1 Broker Scorecards/Horizons Insurance And Financial Services, Inc_Broker_Scorecard.pptx
@@ -3394,7 +3394,7 @@
                         <a:rPr sz="900">
                           <a:latin typeface="Segoe UI"/>
                         </a:rPr>
-                        <a:t>Tier 1  |  6.35% / 15.00%</a:t>
+                        <a:t>Tier 1  |  6.42% / 15.00%</a:t>
                       </a:r>
                     </a:p>
                   </a:txBody>
@@ -3690,7 +3690,7 @@
                         <a:rPr sz="900">
                           <a:latin typeface="Segoe UI"/>
                         </a:rPr>
-                        <a:t>Fleet Bound Premium: $368,089.21</a:t>
+                        <a:t>Fleet Bound Premium: $364,051.51</a:t>
                       </a:r>
                     </a:p>
                   </a:txBody>
@@ -3727,7 +3727,7 @@
                         <a:rPr sz="900">
                           <a:latin typeface="Segoe UI"/>
                         </a:rPr>
-                        <a:t>Fleet Book %: 18.8%</a:t>
+                        <a:t>Fleet Book %: 18.6%</a:t>
                       </a:r>
                     </a:p>
                   </a:txBody>
@@ -3766,7 +3766,7 @@
                         <a:rPr sz="900">
                           <a:latin typeface="Segoe UI"/>
                         </a:rPr>
-                        <a:t>Non-Fleet Subs: 1261  |  Binds: 79</a:t>
+                        <a:t>Non-Fleet Subs: 1261  |  Binds: 80</a:t>
                       </a:r>
                     </a:p>
                   </a:txBody>
@@ -3803,7 +3803,7 @@
                         <a:rPr sz="900">
                           <a:latin typeface="Segoe UI"/>
                         </a:rPr>
-                        <a:t>Non-Fleet Bound Premium: $1,587,031.53</a:t>
+                        <a:t>Non-Fleet Bound Premium: $1,591,069.23</a:t>
                       </a:r>
                     </a:p>
                   </a:txBody>
@@ -3840,7 +3840,7 @@
                         <a:rPr sz="900">
                           <a:latin typeface="Segoe UI"/>
                         </a:rPr>
-                        <a:t>Non-Fleet Book %: 81.2%</a:t>
+                        <a:t>Non-Fleet Book %: 81.4%</a:t>
                       </a:r>
                     </a:p>
                   </a:txBody>

--- a/generated/Tier 1 Broker Scorecards/Horizons Insurance And Financial Services, Inc_Broker_Scorecard.pptx
+++ b/generated/Tier 1 Broker Scorecards/Horizons Insurance And Financial Services, Inc_Broker_Scorecard.pptx
@@ -3394,7 +3394,7 @@
                         <a:rPr sz="900">
                           <a:latin typeface="Segoe UI"/>
                         </a:rPr>
-                        <a:t>Tier 1  |  6.42% / 15.00%</a:t>
+                        <a:t>Tier 1  |  6.50% / 15.00%</a:t>
                       </a:r>
                     </a:p>
                   </a:txBody>
@@ -3690,7 +3690,7 @@
                         <a:rPr sz="900">
                           <a:latin typeface="Segoe UI"/>
                         </a:rPr>
-                        <a:t>Fleet Bound Premium: $364,051.51</a:t>
+                        <a:t>Fleet Bound Premium: $359,200.99</a:t>
                       </a:r>
                     </a:p>
                   </a:txBody>
@@ -3727,7 +3727,7 @@
                         <a:rPr sz="900">
                           <a:latin typeface="Segoe UI"/>
                         </a:rPr>
-                        <a:t>Fleet Book %: 18.6%</a:t>
+                        <a:t>Fleet Book %: 18.4%</a:t>
                       </a:r>
                     </a:p>
                   </a:txBody>
@@ -3766,7 +3766,7 @@
                         <a:rPr sz="900">
                           <a:latin typeface="Segoe UI"/>
                         </a:rPr>
-                        <a:t>Non-Fleet Subs: 1261  |  Binds: 80</a:t>
+                        <a:t>Non-Fleet Subs: 1261  |  Binds: 81</a:t>
                       </a:r>
                     </a:p>
                   </a:txBody>
@@ -3803,7 +3803,7 @@
                         <a:rPr sz="900">
                           <a:latin typeface="Segoe UI"/>
                         </a:rPr>
-                        <a:t>Non-Fleet Bound Premium: $1,591,069.23</a:t>
+                        <a:t>Non-Fleet Bound Premium: $1,595,919.75</a:t>
                       </a:r>
                     </a:p>
                   </a:txBody>
@@ -3840,7 +3840,7 @@
                         <a:rPr sz="900">
                           <a:latin typeface="Segoe UI"/>
                         </a:rPr>
-                        <a:t>Non-Fleet Book %: 81.4%</a:t>
+                        <a:t>Non-Fleet Book %: 81.6%</a:t>
                       </a:r>
                     </a:p>
                   </a:txBody>
@@ -4664,7 +4664,7 @@
                         <a:rPr sz="800">
                           <a:latin typeface="Segoe UI"/>
                         </a:rPr>
-                        <a:t>17.6%</a:t>
+                        <a:t>17.2%</a:t>
                       </a:r>
                     </a:p>
                   </a:txBody>
@@ -4943,7 +4943,7 @@
                         <a:rPr sz="800">
                           <a:latin typeface="Segoe UI"/>
                         </a:rPr>
-                        <a:t>45</a:t>
+                        <a:t>44</a:t>
                       </a:r>
                     </a:p>
                   </a:txBody>

--- a/generated/Tier 1 Broker Scorecards/Horizons Insurance And Financial Services, Inc_Broker_Scorecard.pptx
+++ b/generated/Tier 1 Broker Scorecards/Horizons Insurance And Financial Services, Inc_Broker_Scorecard.pptx
@@ -3394,7 +3394,7 @@
                         <a:rPr sz="900">
                           <a:latin typeface="Segoe UI"/>
                         </a:rPr>
-                        <a:t>Tier 1  |  6.50% / 15.00%</a:t>
+                        <a:t>Tier 1  |  6.42% / 15.00%</a:t>
                       </a:r>
                     </a:p>
                   </a:txBody>
@@ -3690,7 +3690,7 @@
                         <a:rPr sz="900">
                           <a:latin typeface="Segoe UI"/>
                         </a:rPr>
-                        <a:t>Fleet Bound Premium: $359,200.99</a:t>
+                        <a:t>Fleet Bound Premium: $364,233.98</a:t>
                       </a:r>
                     </a:p>
                   </a:txBody>
@@ -3727,7 +3727,7 @@
                         <a:rPr sz="900">
                           <a:latin typeface="Segoe UI"/>
                         </a:rPr>
-                        <a:t>Fleet Book %: 18.4%</a:t>
+                        <a:t>Fleet Book %: 18.6%</a:t>
                       </a:r>
                     </a:p>
                   </a:txBody>
@@ -3766,7 +3766,7 @@
                         <a:rPr sz="900">
                           <a:latin typeface="Segoe UI"/>
                         </a:rPr>
-                        <a:t>Non-Fleet Subs: 1261  |  Binds: 81</a:t>
+                        <a:t>Non-Fleet Subs: 1262  |  Binds: 80</a:t>
                       </a:r>
                     </a:p>
                   </a:txBody>
@@ -3803,7 +3803,7 @@
                         <a:rPr sz="900">
                           <a:latin typeface="Segoe UI"/>
                         </a:rPr>
-                        <a:t>Non-Fleet Bound Premium: $1,595,919.75</a:t>
+                        <a:t>Non-Fleet Bound Premium: $1,590,886.76</a:t>
                       </a:r>
                     </a:p>
                   </a:txBody>
@@ -3840,7 +3840,7 @@
                         <a:rPr sz="900">
                           <a:latin typeface="Segoe UI"/>
                         </a:rPr>
-                        <a:t>Non-Fleet Book %: 81.6%</a:t>
+                        <a:t>Non-Fleet Book %: 81.4%</a:t>
                       </a:r>
                     </a:p>
                   </a:txBody>
@@ -4428,7 +4428,7 @@
                           </a:solidFill>
                           <a:latin typeface="Segoe UI"/>
                         </a:rPr>
-                        <a:t>246</a:t>
+                        <a:t>247</a:t>
                       </a:r>
                     </a:p>
                   </a:txBody>
@@ -4664,7 +4664,7 @@
                         <a:rPr sz="800">
                           <a:latin typeface="Segoe UI"/>
                         </a:rPr>
-                        <a:t>17.2%</a:t>
+                        <a:t>17.6%</a:t>
                       </a:r>
                     </a:p>
                   </a:txBody>
@@ -4707,7 +4707,7 @@
                           </a:solidFill>
                           <a:latin typeface="Segoe UI"/>
                         </a:rPr>
-                        <a:t>9.8%</a:t>
+                        <a:t>9.7%</a:t>
                       </a:r>
                     </a:p>
                   </a:txBody>
@@ -4943,7 +4943,7 @@
                         <a:rPr sz="800">
                           <a:latin typeface="Segoe UI"/>
                         </a:rPr>
-                        <a:t>44</a:t>
+                        <a:t>45</a:t>
                       </a:r>
                     </a:p>
                   </a:txBody>

--- a/generated/Tier 1 Broker Scorecards/Horizons Insurance And Financial Services, Inc_Broker_Scorecard.pptx
+++ b/generated/Tier 1 Broker Scorecards/Horizons Insurance And Financial Services, Inc_Broker_Scorecard.pptx
@@ -3357,7 +3357,7 @@
                         <a:rPr sz="800">
                           <a:latin typeface="Segoe UI"/>
                         </a:rPr>
-                        <a:t>$4,857,693.58 / $5,217,636.03 / $1,955,120.74</a:t>
+                        <a:t>$4,857,693.58 / $5,243,674.95 / $1,981,159.66</a:t>
                       </a:r>
                     </a:p>
                   </a:txBody>
@@ -3394,7 +3394,7 @@
                         <a:rPr sz="900">
                           <a:latin typeface="Segoe UI"/>
                         </a:rPr>
-                        <a:t>Tier 1  |  6.42% / 15.00%</a:t>
+                        <a:t>Tier 1  |  6.53% / 15.00%</a:t>
                       </a:r>
                     </a:p>
                   </a:txBody>
@@ -3431,7 +3431,7 @@
                         <a:rPr sz="900">
                           <a:latin typeface="Segoe UI"/>
                         </a:rPr>
-                        <a:t>$6,800,771.01  (28.7% achieved)</a:t>
+                        <a:t>$6,800,771.01  (29.1% achieved)</a:t>
                       </a:r>
                     </a:p>
                   </a:txBody>
@@ -3653,7 +3653,7 @@
                         <a:rPr sz="900">
                           <a:latin typeface="Segoe UI"/>
                         </a:rPr>
-                        <a:t>Fleet Subs: 78  |  Binds: 6</a:t>
+                        <a:t>Fleet Subs: 78  |  Binds: 7</a:t>
                       </a:r>
                     </a:p>
                   </a:txBody>
@@ -3690,7 +3690,7 @@
                         <a:rPr sz="900">
                           <a:latin typeface="Segoe UI"/>
                         </a:rPr>
-                        <a:t>Fleet Bound Premium: $364,233.98</a:t>
+                        <a:t>Fleet Bound Premium: $452,578.63</a:t>
                       </a:r>
                     </a:p>
                   </a:txBody>
@@ -3727,7 +3727,7 @@
                         <a:rPr sz="900">
                           <a:latin typeface="Segoe UI"/>
                         </a:rPr>
-                        <a:t>Fleet Book %: 18.6%</a:t>
+                        <a:t>Fleet Book %: 22.8%</a:t>
                       </a:r>
                     </a:p>
                   </a:txBody>
@@ -3766,7 +3766,7 @@
                         <a:rPr sz="900">
                           <a:latin typeface="Segoe UI"/>
                         </a:rPr>
-                        <a:t>Non-Fleet Subs: 1262  |  Binds: 80</a:t>
+                        <a:t>Non-Fleet Subs: 1270  |  Binds: 81</a:t>
                       </a:r>
                     </a:p>
                   </a:txBody>
@@ -3803,7 +3803,7 @@
                         <a:rPr sz="900">
                           <a:latin typeface="Segoe UI"/>
                         </a:rPr>
-                        <a:t>Non-Fleet Bound Premium: $1,590,886.76</a:t>
+                        <a:t>Non-Fleet Bound Premium: $1,528,581.03</a:t>
                       </a:r>
                     </a:p>
                   </a:txBody>
@@ -3840,7 +3840,7 @@
                         <a:rPr sz="900">
                           <a:latin typeface="Segoe UI"/>
                         </a:rPr>
-                        <a:t>Non-Fleet Book %: 81.4%</a:t>
+                        <a:t>Non-Fleet Book %: 77.2%</a:t>
                       </a:r>
                     </a:p>
                   </a:txBody>
@@ -4424,11 +4424,11 @@
                       <a:r>
                         <a:rPr sz="800">
                           <a:solidFill>
-                            <a:srgbClr val="DC2626"/>
+                            <a:srgbClr val="059669"/>
                           </a:solidFill>
                           <a:latin typeface="Segoe UI"/>
                         </a:rPr>
-                        <a:t>247</a:t>
+                        <a:t>257</a:t>
                       </a:r>
                     </a:p>
                   </a:txBody>
@@ -4707,7 +4707,7 @@
                           </a:solidFill>
                           <a:latin typeface="Segoe UI"/>
                         </a:rPr>
-                        <a:t>9.7%</a:t>
+                        <a:t>10.5%</a:t>
                       </a:r>
                     </a:p>
                   </a:txBody>
@@ -4983,7 +4983,7 @@
                           </a:solidFill>
                           <a:latin typeface="Segoe UI"/>
                         </a:rPr>
-                        <a:t>24</a:t>
+                        <a:t>27</a:t>
                       </a:r>
                     </a:p>
                   </a:txBody>
@@ -5262,7 +5262,7 @@
                           </a:solidFill>
                           <a:latin typeface="Segoe UI"/>
                         </a:rPr>
-                        <a:t>$208.9K</a:t>
+                        <a:t>$234.9K</a:t>
                       </a:r>
                     </a:p>
                   </a:txBody>

--- a/generated/Tier 1 Broker Scorecards/Horizons Insurance And Financial Services, Inc_Broker_Scorecard.pptx
+++ b/generated/Tier 1 Broker Scorecards/Horizons Insurance And Financial Services, Inc_Broker_Scorecard.pptx
@@ -3357,7 +3357,7 @@
                         <a:rPr sz="800">
                           <a:latin typeface="Segoe UI"/>
                         </a:rPr>
-                        <a:t>$4,857,693.58 / $5,243,674.95 / $1,981,159.66</a:t>
+                        <a:t>$4,857,693.58 / $5,243,674.60 / $1,981,159.31</a:t>
                       </a:r>
                     </a:p>
                   </a:txBody>
@@ -3394,7 +3394,7 @@
                         <a:rPr sz="900">
                           <a:latin typeface="Segoe UI"/>
                         </a:rPr>
-                        <a:t>Tier 1  |  6.53% / 15.00%</a:t>
+                        <a:t>Tier 1  |  6.49% / 15.00%</a:t>
                       </a:r>
                     </a:p>
                   </a:txBody>
@@ -3690,7 +3690,7 @@
                         <a:rPr sz="900">
                           <a:latin typeface="Segoe UI"/>
                         </a:rPr>
-                        <a:t>Fleet Bound Premium: $452,578.63</a:t>
+                        <a:t>Fleet Bound Premium: $452,364.72</a:t>
                       </a:r>
                     </a:p>
                   </a:txBody>
@@ -3766,7 +3766,7 @@
                         <a:rPr sz="900">
                           <a:latin typeface="Segoe UI"/>
                         </a:rPr>
-                        <a:t>Non-Fleet Subs: 1270  |  Binds: 81</a:t>
+                        <a:t>Non-Fleet Subs: 1278  |  Binds: 81</a:t>
                       </a:r>
                     </a:p>
                   </a:txBody>
@@ -3803,7 +3803,7 @@
                         <a:rPr sz="900">
                           <a:latin typeface="Segoe UI"/>
                         </a:rPr>
-                        <a:t>Non-Fleet Bound Premium: $1,528,581.03</a:t>
+                        <a:t>Non-Fleet Bound Premium: $1,528,794.59</a:t>
                       </a:r>
                     </a:p>
                   </a:txBody>
@@ -4428,7 +4428,7 @@
                           </a:solidFill>
                           <a:latin typeface="Segoe UI"/>
                         </a:rPr>
-                        <a:t>257</a:t>
+                        <a:t>266</a:t>
                       </a:r>
                     </a:p>
                   </a:txBody>
@@ -4664,7 +4664,7 @@
                         <a:rPr sz="800">
                           <a:latin typeface="Segoe UI"/>
                         </a:rPr>
-                        <a:t>17.6%</a:t>
+                        <a:t>17.2%</a:t>
                       </a:r>
                     </a:p>
                   </a:txBody>
@@ -4707,7 +4707,7 @@
                           </a:solidFill>
                           <a:latin typeface="Segoe UI"/>
                         </a:rPr>
-                        <a:t>10.5%</a:t>
+                        <a:t>10.2%</a:t>
                       </a:r>
                     </a:p>
                   </a:txBody>
@@ -4943,7 +4943,7 @@
                         <a:rPr sz="800">
                           <a:latin typeface="Segoe UI"/>
                         </a:rPr>
-                        <a:t>45</a:t>
+                        <a:t>44</a:t>
                       </a:r>
                     </a:p>
                   </a:txBody>

--- a/generated/Tier 1 Broker Scorecards/Horizons Insurance And Financial Services, Inc_Broker_Scorecard.pptx
+++ b/generated/Tier 1 Broker Scorecards/Horizons Insurance And Financial Services, Inc_Broker_Scorecard.pptx
@@ -3357,7 +3357,7 @@
                         <a:rPr sz="800">
                           <a:latin typeface="Segoe UI"/>
                         </a:rPr>
-                        <a:t>$4,857,693.58 / $5,243,674.60 / $1,981,159.31</a:t>
+                        <a:t>$4,857,693.58 / $5,269,991.21 / $2,007,475.92</a:t>
                       </a:r>
                     </a:p>
                   </a:txBody>
@@ -3394,7 +3394,7 @@
                         <a:rPr sz="900">
                           <a:latin typeface="Segoe UI"/>
                         </a:rPr>
-                        <a:t>Tier 1  |  6.49% / 15.00%</a:t>
+                        <a:t>Tier 1  |  6.72% / 15.00%</a:t>
                       </a:r>
                     </a:p>
                   </a:txBody>
@@ -3431,7 +3431,7 @@
                         <a:rPr sz="900">
                           <a:latin typeface="Segoe UI"/>
                         </a:rPr>
-                        <a:t>$6,800,771.01  (29.1% achieved)</a:t>
+                        <a:t>$6,800,771.01  (29.5% achieved)</a:t>
                       </a:r>
                     </a:p>
                   </a:txBody>
@@ -3653,7 +3653,7 @@
                         <a:rPr sz="900">
                           <a:latin typeface="Segoe UI"/>
                         </a:rPr>
-                        <a:t>Fleet Subs: 78  |  Binds: 7</a:t>
+                        <a:t>Fleet Subs: 79  |  Binds: 8</a:t>
                       </a:r>
                     </a:p>
                   </a:txBody>
@@ -3690,7 +3690,7 @@
                         <a:rPr sz="900">
                           <a:latin typeface="Segoe UI"/>
                         </a:rPr>
-                        <a:t>Fleet Bound Premium: $452,364.72</a:t>
+                        <a:t>Fleet Bound Premium: $507,187.62</a:t>
                       </a:r>
                     </a:p>
                   </a:txBody>
@@ -3727,7 +3727,7 @@
                         <a:rPr sz="900">
                           <a:latin typeface="Segoe UI"/>
                         </a:rPr>
-                        <a:t>Fleet Book %: 22.8%</a:t>
+                        <a:t>Fleet Book %: 25.3%</a:t>
                       </a:r>
                     </a:p>
                   </a:txBody>
@@ -3766,7 +3766,7 @@
                         <a:rPr sz="900">
                           <a:latin typeface="Segoe UI"/>
                         </a:rPr>
-                        <a:t>Non-Fleet Subs: 1278  |  Binds: 81</a:t>
+                        <a:t>Non-Fleet Subs: 1290  |  Binds: 84</a:t>
                       </a:r>
                     </a:p>
                   </a:txBody>
@@ -3803,7 +3803,7 @@
                         <a:rPr sz="900">
                           <a:latin typeface="Segoe UI"/>
                         </a:rPr>
-                        <a:t>Non-Fleet Bound Premium: $1,528,794.59</a:t>
+                        <a:t>Non-Fleet Bound Premium: $1,500,288.30</a:t>
                       </a:r>
                     </a:p>
                   </a:txBody>
@@ -3840,7 +3840,7 @@
                         <a:rPr sz="900">
                           <a:latin typeface="Segoe UI"/>
                         </a:rPr>
-                        <a:t>Non-Fleet Book %: 77.2%</a:t>
+                        <a:t>Non-Fleet Book %: 74.7%</a:t>
                       </a:r>
                     </a:p>
                   </a:txBody>
@@ -4428,7 +4428,7 @@
                           </a:solidFill>
                           <a:latin typeface="Segoe UI"/>
                         </a:rPr>
-                        <a:t>266</a:t>
+                        <a:t>279</a:t>
                       </a:r>
                     </a:p>
                   </a:txBody>
@@ -4664,7 +4664,7 @@
                         <a:rPr sz="800">
                           <a:latin typeface="Segoe UI"/>
                         </a:rPr>
-                        <a:t>17.2%</a:t>
+                        <a:t>17.6%</a:t>
                       </a:r>
                     </a:p>
                   </a:txBody>
@@ -4707,7 +4707,7 @@
                           </a:solidFill>
                           <a:latin typeface="Segoe UI"/>
                         </a:rPr>
-                        <a:t>10.2%</a:t>
+                        <a:t>11.1%</a:t>
                       </a:r>
                     </a:p>
                   </a:txBody>
@@ -4943,7 +4943,7 @@
                         <a:rPr sz="800">
                           <a:latin typeface="Segoe UI"/>
                         </a:rPr>
-                        <a:t>44</a:t>
+                        <a:t>45</a:t>
                       </a:r>
                     </a:p>
                   </a:txBody>
@@ -4983,7 +4983,7 @@
                           </a:solidFill>
                           <a:latin typeface="Segoe UI"/>
                         </a:rPr>
-                        <a:t>27</a:t>
+                        <a:t>31</a:t>
                       </a:r>
                     </a:p>
                   </a:txBody>
@@ -5262,7 +5262,7 @@
                           </a:solidFill>
                           <a:latin typeface="Segoe UI"/>
                         </a:rPr>
-                        <a:t>$234.9K</a:t>
+                        <a:t>$261.2K</a:t>
                       </a:r>
                     </a:p>
                   </a:txBody>

--- a/generated/Tier 1 Broker Scorecards/Horizons Insurance And Financial Services, Inc_Broker_Scorecard.pptx
+++ b/generated/Tier 1 Broker Scorecards/Horizons Insurance And Financial Services, Inc_Broker_Scorecard.pptx
@@ -3357,7 +3357,7 @@
                         <a:rPr sz="800">
                           <a:latin typeface="Segoe UI"/>
                         </a:rPr>
-                        <a:t>$4,857,693.58 / $5,269,991.21 / $2,007,475.92</a:t>
+                        <a:t>$4,857,693.58 / $5,270,542.39 / $2,008,027.10</a:t>
                       </a:r>
                     </a:p>
                   </a:txBody>
@@ -3394,7 +3394,7 @@
                         <a:rPr sz="900">
                           <a:latin typeface="Segoe UI"/>
                         </a:rPr>
-                        <a:t>Tier 1  |  6.72% / 15.00%</a:t>
+                        <a:t>Tier 1  |  6.67% / 15.00%</a:t>
                       </a:r>
                     </a:p>
                   </a:txBody>
@@ -3690,7 +3690,7 @@
                         <a:rPr sz="900">
                           <a:latin typeface="Segoe UI"/>
                         </a:rPr>
-                        <a:t>Fleet Bound Premium: $507,187.62</a:t>
+                        <a:t>Fleet Bound Premium: $509,460.14</a:t>
                       </a:r>
                     </a:p>
                   </a:txBody>
@@ -3727,7 +3727,7 @@
                         <a:rPr sz="900">
                           <a:latin typeface="Segoe UI"/>
                         </a:rPr>
-                        <a:t>Fleet Book %: 25.3%</a:t>
+                        <a:t>Fleet Book %: 25.4%</a:t>
                       </a:r>
                     </a:p>
                   </a:txBody>
@@ -3766,7 +3766,7 @@
                         <a:rPr sz="900">
                           <a:latin typeface="Segoe UI"/>
                         </a:rPr>
-                        <a:t>Non-Fleet Subs: 1290  |  Binds: 84</a:t>
+                        <a:t>Non-Fleet Subs: 1300  |  Binds: 84</a:t>
                       </a:r>
                     </a:p>
                   </a:txBody>
@@ -3803,7 +3803,7 @@
                         <a:rPr sz="900">
                           <a:latin typeface="Segoe UI"/>
                         </a:rPr>
-                        <a:t>Non-Fleet Bound Premium: $1,500,288.30</a:t>
+                        <a:t>Non-Fleet Bound Premium: $1,498,566.96</a:t>
                       </a:r>
                     </a:p>
                   </a:txBody>
@@ -3840,7 +3840,7 @@
                         <a:rPr sz="900">
                           <a:latin typeface="Segoe UI"/>
                         </a:rPr>
-                        <a:t>Non-Fleet Book %: 74.7%</a:t>
+                        <a:t>Non-Fleet Book %: 74.6%</a:t>
                       </a:r>
                     </a:p>
                   </a:txBody>
@@ -4428,7 +4428,7 @@
                           </a:solidFill>
                           <a:latin typeface="Segoe UI"/>
                         </a:rPr>
-                        <a:t>279</a:t>
+                        <a:t>290</a:t>
                       </a:r>
                     </a:p>
                   </a:txBody>
@@ -4624,7 +4624,7 @@
                           </a:solidFill>
                           <a:latin typeface="Segoe UI"/>
                         </a:rPr>
-                        <a:t>9.0%</a:t>
+                        <a:t>9.2%</a:t>
                       </a:r>
                     </a:p>
                   </a:txBody>
@@ -4707,7 +4707,7 @@
                           </a:solidFill>
                           <a:latin typeface="Segoe UI"/>
                         </a:rPr>
-                        <a:t>11.1%</a:t>
+                        <a:t>10.3%</a:t>
                       </a:r>
                     </a:p>
                   </a:txBody>
@@ -4906,7 +4906,7 @@
                           </a:solidFill>
                           <a:latin typeface="Segoe UI"/>
                         </a:rPr>
-                        <a:t>32</a:t>
+                        <a:t>33</a:t>
                       </a:r>
                     </a:p>
                   </a:txBody>
@@ -4983,7 +4983,7 @@
                           </a:solidFill>
                           <a:latin typeface="Segoe UI"/>
                         </a:rPr>
-                        <a:t>31</a:t>
+                        <a:t>30</a:t>
                       </a:r>
                     </a:p>
                   </a:txBody>
@@ -5262,7 +5262,7 @@
                           </a:solidFill>
                           <a:latin typeface="Segoe UI"/>
                         </a:rPr>
-                        <a:t>$261.2K</a:t>
+                        <a:t>$261.8K</a:t>
                       </a:r>
                     </a:p>
                   </a:txBody>

--- a/generated/Tier 1 Broker Scorecards/Horizons Insurance And Financial Services, Inc_Broker_Scorecard.pptx
+++ b/generated/Tier 1 Broker Scorecards/Horizons Insurance And Financial Services, Inc_Broker_Scorecard.pptx
@@ -3394,7 +3394,7 @@
                         <a:rPr sz="900">
                           <a:latin typeface="Segoe UI"/>
                         </a:rPr>
-                        <a:t>Tier 1  |  6.67% / 15.00%</a:t>
+                        <a:t>Tier 1  |  6.59% / 15.00%</a:t>
                       </a:r>
                     </a:p>
                   </a:txBody>
@@ -3690,7 +3690,7 @@
                         <a:rPr sz="900">
                           <a:latin typeface="Segoe UI"/>
                         </a:rPr>
-                        <a:t>Fleet Bound Premium: $509,460.14</a:t>
+                        <a:t>Fleet Bound Premium: $518,297.77</a:t>
                       </a:r>
                     </a:p>
                   </a:txBody>
@@ -3727,7 +3727,7 @@
                         <a:rPr sz="900">
                           <a:latin typeface="Segoe UI"/>
                         </a:rPr>
-                        <a:t>Fleet Book %: 25.4%</a:t>
+                        <a:t>Fleet Book %: 25.8%</a:t>
                       </a:r>
                     </a:p>
                   </a:txBody>
@@ -3766,7 +3766,7 @@
                         <a:rPr sz="900">
                           <a:latin typeface="Segoe UI"/>
                         </a:rPr>
-                        <a:t>Non-Fleet Subs: 1300  |  Binds: 84</a:t>
+                        <a:t>Non-Fleet Subs: 1301  |  Binds: 83</a:t>
                       </a:r>
                     </a:p>
                   </a:txBody>
@@ -3803,7 +3803,7 @@
                         <a:rPr sz="900">
                           <a:latin typeface="Segoe UI"/>
                         </a:rPr>
-                        <a:t>Non-Fleet Bound Premium: $1,498,566.96</a:t>
+                        <a:t>Non-Fleet Bound Premium: $1,489,729.33</a:t>
                       </a:r>
                     </a:p>
                   </a:txBody>
@@ -3840,7 +3840,7 @@
                         <a:rPr sz="900">
                           <a:latin typeface="Segoe UI"/>
                         </a:rPr>
-                        <a:t>Non-Fleet Book %: 74.6%</a:t>
+                        <a:t>Non-Fleet Book %: 74.2%</a:t>
                       </a:r>
                     </a:p>
                   </a:txBody>
@@ -4428,7 +4428,7 @@
                           </a:solidFill>
                           <a:latin typeface="Segoe UI"/>
                         </a:rPr>
-                        <a:t>290</a:t>
+                        <a:t>291</a:t>
                       </a:r>
                     </a:p>
                   </a:txBody>

--- a/generated/Tier 1 Broker Scorecards/Horizons Insurance And Financial Services, Inc_Broker_Scorecard.pptx
+++ b/generated/Tier 1 Broker Scorecards/Horizons Insurance And Financial Services, Inc_Broker_Scorecard.pptx
@@ -3357,7 +3357,7 @@
                         <a:rPr sz="800">
                           <a:latin typeface="Segoe UI"/>
                         </a:rPr>
-                        <a:t>$4,857,693.58 / $5,270,542.39 / $2,008,027.10</a:t>
+                        <a:t>$4,857,693.58 / $4,998,360.26 / $2,101,395.50</a:t>
                       </a:r>
                     </a:p>
                   </a:txBody>
@@ -3431,7 +3431,7 @@
                         <a:rPr sz="900">
                           <a:latin typeface="Segoe UI"/>
                         </a:rPr>
-                        <a:t>$6,800,771.01  (29.5% achieved)</a:t>
+                        <a:t>$6,800,771.01  (30.9% achieved)</a:t>
                       </a:r>
                     </a:p>
                   </a:txBody>
@@ -3690,7 +3690,7 @@
                         <a:rPr sz="900">
                           <a:latin typeface="Segoe UI"/>
                         </a:rPr>
-                        <a:t>Fleet Bound Premium: $518,297.77</a:t>
+                        <a:t>Fleet Bound Premium: $542,397.37</a:t>
                       </a:r>
                     </a:p>
                   </a:txBody>
@@ -3766,7 +3766,7 @@
                         <a:rPr sz="900">
                           <a:latin typeface="Segoe UI"/>
                         </a:rPr>
-                        <a:t>Non-Fleet Subs: 1301  |  Binds: 83</a:t>
+                        <a:t>Non-Fleet Subs: 1302  |  Binds: 83</a:t>
                       </a:r>
                     </a:p>
                   </a:txBody>
@@ -3803,7 +3803,7 @@
                         <a:rPr sz="900">
                           <a:latin typeface="Segoe UI"/>
                         </a:rPr>
-                        <a:t>Non-Fleet Bound Premium: $1,489,729.33</a:t>
+                        <a:t>Non-Fleet Bound Premium: $1,558,998.13</a:t>
                       </a:r>
                     </a:p>
                   </a:txBody>
@@ -4428,7 +4428,7 @@
                           </a:solidFill>
                           <a:latin typeface="Segoe UI"/>
                         </a:rPr>
-                        <a:t>291</a:t>
+                        <a:t>292</a:t>
                       </a:r>
                     </a:p>
                   </a:txBody>
@@ -4500,9 +4500,12 @@
                       <a:pPr algn="ctr"/>
                       <a:r>
                         <a:rPr sz="800">
+                          <a:solidFill>
+                            <a:srgbClr val="DC2626"/>
+                          </a:solidFill>
                           <a:latin typeface="Segoe UI"/>
                         </a:rPr>
-                        <a:t/>
+                        <a:t>1</a:t>
                       </a:r>
                     </a:p>
                   </a:txBody>
